--- a/AI漫剧制作课程/PPT课件/模块10-音频制作.pptx
+++ b/AI漫剧制作课程/PPT课件/模块10-音频制作.pptx
@@ -11626,7 +11626,7 @@
               </a:defRPr>
             </a:pPr>
             <a:r>
-              <a:t>🛠️  本模块实操任务</a:t>
+              <a:t>◆  本模块实操任务</a:t>
             </a:r>
           </a:p>
         </p:txBody>
@@ -14932,7 +14932,7 @@
               </a:defRPr>
             </a:pPr>
             <a:r>
-              <a:t>✓</a:t>
+              <a:t>◆</a:t>
             </a:r>
           </a:p>
         </p:txBody>
@@ -17049,7 +17049,7 @@
               </a:defRPr>
             </a:pPr>
             <a:r>
-              <a:t>📋  本节内容</a:t>
+              <a:t>§  本节内容</a:t>
             </a:r>
           </a:p>
         </p:txBody>
@@ -19011,7 +19011,7 @@
               </a:defRPr>
             </a:pPr>
             <a:r>
-              <a:t>📊  🎤 AI音频工具核心参数</a:t>
+              <a:t>▤  ◓ AI音频工具核心参数</a:t>
             </a:r>
           </a:p>
         </p:txBody>
